--- a/black bgc.pptx
+++ b/black bgc.pptx
@@ -6,6 +6,8 @@
   </p:sldMasterIdLst>
   <p:sldIdLst>
     <p:sldId id="256" r:id="rId2"/>
+    <p:sldId id="257" r:id="rId3"/>
+    <p:sldId id="258" r:id="rId4"/>
   </p:sldIdLst>
   <p:sldSz cx="12192000" cy="6858000"/>
   <p:notesSz cx="6858000" cy="9144000"/>
@@ -104,6 +106,11 @@
       </a:defRPr>
     </a:lvl9pPr>
   </p:defaultTextStyle>
+  <p:extLst>
+    <p:ext uri="{EFAFB233-063F-42B5-8137-9DF3F51BA10A}">
+      <p15:sldGuideLst xmlns:p15="http://schemas.microsoft.com/office/powerpoint/2012/main"/>
+    </p:ext>
+  </p:extLst>
 </p:presentation>
 </file>
 
@@ -254,7 +261,7 @@
           <a:p>
             <a:fld id="{61123542-2FAF-479E-8C27-BAB01FE19710}" type="datetimeFigureOut">
               <a:rPr lang="zh-CN" altLang="en-US" smtClean="0"/>
-              <a:t>2026/8/23</a:t>
+              <a:t>2026/8/24</a:t>
             </a:fld>
             <a:endParaRPr lang="zh-CN" altLang="en-US"/>
           </a:p>
@@ -452,7 +459,7 @@
           <a:p>
             <a:fld id="{61123542-2FAF-479E-8C27-BAB01FE19710}" type="datetimeFigureOut">
               <a:rPr lang="zh-CN" altLang="en-US" smtClean="0"/>
-              <a:t>2026/8/23</a:t>
+              <a:t>2026/8/24</a:t>
             </a:fld>
             <a:endParaRPr lang="zh-CN" altLang="en-US"/>
           </a:p>
@@ -660,7 +667,7 @@
           <a:p>
             <a:fld id="{61123542-2FAF-479E-8C27-BAB01FE19710}" type="datetimeFigureOut">
               <a:rPr lang="zh-CN" altLang="en-US" smtClean="0"/>
-              <a:t>2026/8/23</a:t>
+              <a:t>2026/8/24</a:t>
             </a:fld>
             <a:endParaRPr lang="zh-CN" altLang="en-US"/>
           </a:p>
@@ -858,7 +865,7 @@
           <a:p>
             <a:fld id="{61123542-2FAF-479E-8C27-BAB01FE19710}" type="datetimeFigureOut">
               <a:rPr lang="zh-CN" altLang="en-US" smtClean="0"/>
-              <a:t>2026/8/23</a:t>
+              <a:t>2026/8/24</a:t>
             </a:fld>
             <a:endParaRPr lang="zh-CN" altLang="en-US"/>
           </a:p>
@@ -1133,7 +1140,7 @@
           <a:p>
             <a:fld id="{61123542-2FAF-479E-8C27-BAB01FE19710}" type="datetimeFigureOut">
               <a:rPr lang="zh-CN" altLang="en-US" smtClean="0"/>
-              <a:t>2026/8/23</a:t>
+              <a:t>2026/8/24</a:t>
             </a:fld>
             <a:endParaRPr lang="zh-CN" altLang="en-US"/>
           </a:p>
@@ -1398,7 +1405,7 @@
           <a:p>
             <a:fld id="{61123542-2FAF-479E-8C27-BAB01FE19710}" type="datetimeFigureOut">
               <a:rPr lang="zh-CN" altLang="en-US" smtClean="0"/>
-              <a:t>2026/8/23</a:t>
+              <a:t>2026/8/24</a:t>
             </a:fld>
             <a:endParaRPr lang="zh-CN" altLang="en-US"/>
           </a:p>
@@ -1810,7 +1817,7 @@
           <a:p>
             <a:fld id="{61123542-2FAF-479E-8C27-BAB01FE19710}" type="datetimeFigureOut">
               <a:rPr lang="zh-CN" altLang="en-US" smtClean="0"/>
-              <a:t>2026/8/23</a:t>
+              <a:t>2026/8/24</a:t>
             </a:fld>
             <a:endParaRPr lang="zh-CN" altLang="en-US"/>
           </a:p>
@@ -1951,7 +1958,7 @@
           <a:p>
             <a:fld id="{61123542-2FAF-479E-8C27-BAB01FE19710}" type="datetimeFigureOut">
               <a:rPr lang="zh-CN" altLang="en-US" smtClean="0"/>
-              <a:t>2026/8/23</a:t>
+              <a:t>2026/8/24</a:t>
             </a:fld>
             <a:endParaRPr lang="zh-CN" altLang="en-US"/>
           </a:p>
@@ -2064,7 +2071,7 @@
           <a:p>
             <a:fld id="{61123542-2FAF-479E-8C27-BAB01FE19710}" type="datetimeFigureOut">
               <a:rPr lang="zh-CN" altLang="en-US" smtClean="0"/>
-              <a:t>2026/8/23</a:t>
+              <a:t>2026/8/24</a:t>
             </a:fld>
             <a:endParaRPr lang="zh-CN" altLang="en-US"/>
           </a:p>
@@ -2375,7 +2382,7 @@
           <a:p>
             <a:fld id="{61123542-2FAF-479E-8C27-BAB01FE19710}" type="datetimeFigureOut">
               <a:rPr lang="zh-CN" altLang="en-US" smtClean="0"/>
-              <a:t>2026/8/23</a:t>
+              <a:t>2026/8/24</a:t>
             </a:fld>
             <a:endParaRPr lang="zh-CN" altLang="en-US"/>
           </a:p>
@@ -2663,7 +2670,7 @@
           <a:p>
             <a:fld id="{61123542-2FAF-479E-8C27-BAB01FE19710}" type="datetimeFigureOut">
               <a:rPr lang="zh-CN" altLang="en-US" smtClean="0"/>
-              <a:t>2026/8/23</a:t>
+              <a:t>2026/8/24</a:t>
             </a:fld>
             <a:endParaRPr lang="zh-CN" altLang="en-US"/>
           </a:p>
@@ -2907,7 +2914,7 @@
           <a:p>
             <a:fld id="{61123542-2FAF-479E-8C27-BAB01FE19710}" type="datetimeFigureOut">
               <a:rPr lang="zh-CN" altLang="en-US" smtClean="0"/>
-              <a:t>2026/8/23</a:t>
+              <a:t>2026/8/24</a:t>
             </a:fld>
             <a:endParaRPr lang="zh-CN" altLang="en-US"/>
           </a:p>
@@ -3324,10 +3331,190 @@
           <a:chExt cx="0" cy="0"/>
         </a:xfrm>
       </p:grpSpPr>
+      <p:pic>
+        <p:nvPicPr>
+          <p:cNvPr id="3" name="图片 2">
+            <a:extLst>
+              <a:ext uri="{FF2B5EF4-FFF2-40B4-BE49-F238E27FC236}">
+                <a16:creationId xmlns:a16="http://schemas.microsoft.com/office/drawing/2014/main" id="{970BADC4-E182-911F-08D7-CC0C2E82EE34}"/>
+              </a:ext>
+            </a:extLst>
+          </p:cNvPr>
+          <p:cNvPicPr>
+            <a:picLocks noChangeAspect="1"/>
+          </p:cNvPicPr>
+          <p:nvPr/>
+        </p:nvPicPr>
+        <p:blipFill>
+          <a:blip r:embed="rId2">
+            <a:extLst>
+              <a:ext uri="{28A0092B-C50C-407E-A947-70E740481C1C}">
+                <a14:useLocalDpi xmlns:a14="http://schemas.microsoft.com/office/drawing/2010/main" val="0"/>
+              </a:ext>
+            </a:extLst>
+          </a:blip>
+          <a:stretch>
+            <a:fillRect/>
+          </a:stretch>
+        </p:blipFill>
+        <p:spPr>
+          <a:xfrm>
+            <a:off x="1854681" y="2083981"/>
+            <a:ext cx="8482638" cy="4774019"/>
+          </a:xfrm>
+          <a:prstGeom prst="rect">
+            <a:avLst/>
+          </a:prstGeom>
+        </p:spPr>
+      </p:pic>
     </p:spTree>
     <p:extLst>
       <p:ext uri="{BB962C8B-B14F-4D97-AF65-F5344CB8AC3E}">
         <p14:creationId xmlns:p14="http://schemas.microsoft.com/office/powerpoint/2010/main" val="3778904992"/>
+      </p:ext>
+    </p:extLst>
+  </p:cSld>
+  <p:clrMapOvr>
+    <a:masterClrMapping/>
+  </p:clrMapOvr>
+</p:sld>
+</file>
+
+<file path=ppt/slides/slide2.xml><?xml version="1.0" encoding="utf-8"?>
+<p:sld xmlns:a="http://schemas.openxmlformats.org/drawingml/2006/main" xmlns:r="http://schemas.openxmlformats.org/officeDocument/2006/relationships" xmlns:p="http://schemas.openxmlformats.org/presentationml/2006/main">
+  <p:cSld>
+    <p:spTree>
+      <p:nvGrpSpPr>
+        <p:cNvPr id="1" name="">
+          <a:extLst>
+            <a:ext uri="{FF2B5EF4-FFF2-40B4-BE49-F238E27FC236}">
+              <a16:creationId xmlns:a16="http://schemas.microsoft.com/office/drawing/2014/main" id="{186E5180-F4F4-45D8-C2C0-B8DA81F292BA}"/>
+            </a:ext>
+          </a:extLst>
+        </p:cNvPr>
+        <p:cNvGrpSpPr/>
+        <p:nvPr/>
+      </p:nvGrpSpPr>
+      <p:grpSpPr>
+        <a:xfrm>
+          <a:off x="0" y="0"/>
+          <a:ext cx="0" cy="0"/>
+          <a:chOff x="0" y="0"/>
+          <a:chExt cx="0" cy="0"/>
+        </a:xfrm>
+      </p:grpSpPr>
+      <p:pic>
+        <p:nvPicPr>
+          <p:cNvPr id="4" name="图片 3">
+            <a:extLst>
+              <a:ext uri="{FF2B5EF4-FFF2-40B4-BE49-F238E27FC236}">
+                <a16:creationId xmlns:a16="http://schemas.microsoft.com/office/drawing/2014/main" id="{553364EC-4209-3A7E-ECFB-BC157B8F6F9C}"/>
+              </a:ext>
+            </a:extLst>
+          </p:cNvPr>
+          <p:cNvPicPr>
+            <a:picLocks noChangeAspect="1"/>
+          </p:cNvPicPr>
+          <p:nvPr/>
+        </p:nvPicPr>
+        <p:blipFill>
+          <a:blip r:embed="rId2">
+            <a:extLst>
+              <a:ext uri="{28A0092B-C50C-407E-A947-70E740481C1C}">
+                <a14:useLocalDpi xmlns:a14="http://schemas.microsoft.com/office/drawing/2010/main" val="0"/>
+              </a:ext>
+            </a:extLst>
+          </a:blip>
+          <a:stretch>
+            <a:fillRect/>
+          </a:stretch>
+        </p:blipFill>
+        <p:spPr>
+          <a:xfrm>
+            <a:off x="2144365" y="2410047"/>
+            <a:ext cx="7903270" cy="4447953"/>
+          </a:xfrm>
+          <a:prstGeom prst="rect">
+            <a:avLst/>
+          </a:prstGeom>
+        </p:spPr>
+      </p:pic>
+    </p:spTree>
+    <p:extLst>
+      <p:ext uri="{BB962C8B-B14F-4D97-AF65-F5344CB8AC3E}">
+        <p14:creationId xmlns:p14="http://schemas.microsoft.com/office/powerpoint/2010/main" val="4213941460"/>
+      </p:ext>
+    </p:extLst>
+  </p:cSld>
+  <p:clrMapOvr>
+    <a:masterClrMapping/>
+  </p:clrMapOvr>
+</p:sld>
+</file>
+
+<file path=ppt/slides/slide3.xml><?xml version="1.0" encoding="utf-8"?>
+<p:sld xmlns:a="http://schemas.openxmlformats.org/drawingml/2006/main" xmlns:r="http://schemas.openxmlformats.org/officeDocument/2006/relationships" xmlns:p="http://schemas.openxmlformats.org/presentationml/2006/main">
+  <p:cSld>
+    <p:spTree>
+      <p:nvGrpSpPr>
+        <p:cNvPr id="1" name="">
+          <a:extLst>
+            <a:ext uri="{FF2B5EF4-FFF2-40B4-BE49-F238E27FC236}">
+              <a16:creationId xmlns:a16="http://schemas.microsoft.com/office/drawing/2014/main" id="{043032C8-537C-365E-6BE3-839F02939F23}"/>
+            </a:ext>
+          </a:extLst>
+        </p:cNvPr>
+        <p:cNvGrpSpPr/>
+        <p:nvPr/>
+      </p:nvGrpSpPr>
+      <p:grpSpPr>
+        <a:xfrm>
+          <a:off x="0" y="0"/>
+          <a:ext cx="0" cy="0"/>
+          <a:chOff x="0" y="0"/>
+          <a:chExt cx="0" cy="0"/>
+        </a:xfrm>
+      </p:grpSpPr>
+      <p:pic>
+        <p:nvPicPr>
+          <p:cNvPr id="3" name="图片 2">
+            <a:extLst>
+              <a:ext uri="{FF2B5EF4-FFF2-40B4-BE49-F238E27FC236}">
+                <a16:creationId xmlns:a16="http://schemas.microsoft.com/office/drawing/2014/main" id="{72F6BB95-7BCF-C63B-0097-40FBFD7954A6}"/>
+              </a:ext>
+            </a:extLst>
+          </p:cNvPr>
+          <p:cNvPicPr>
+            <a:picLocks noChangeAspect="1"/>
+          </p:cNvPicPr>
+          <p:nvPr/>
+        </p:nvPicPr>
+        <p:blipFill>
+          <a:blip r:embed="rId2">
+            <a:extLst>
+              <a:ext uri="{28A0092B-C50C-407E-A947-70E740481C1C}">
+                <a14:useLocalDpi xmlns:a14="http://schemas.microsoft.com/office/drawing/2010/main" val="0"/>
+              </a:ext>
+            </a:extLst>
+          </a:blip>
+          <a:stretch>
+            <a:fillRect/>
+          </a:stretch>
+        </p:blipFill>
+        <p:spPr>
+          <a:xfrm>
+            <a:off x="2144366" y="2410048"/>
+            <a:ext cx="7903268" cy="4447952"/>
+          </a:xfrm>
+          <a:prstGeom prst="rect">
+            <a:avLst/>
+          </a:prstGeom>
+        </p:spPr>
+      </p:pic>
+    </p:spTree>
+    <p:extLst>
+      <p:ext uri="{BB962C8B-B14F-4D97-AF65-F5344CB8AC3E}">
+        <p14:creationId xmlns:p14="http://schemas.microsoft.com/office/powerpoint/2010/main" val="2286329392"/>
       </p:ext>
     </p:extLst>
   </p:cSld>
